--- a/companies/northgate-staffing/Engagements/Coleman Ltd/2016.04.27 - Briefing Deck - Coleman Ltd.pptx
+++ b/companies/northgate-staffing/Engagements/Coleman Ltd/2016.04.27 - Briefing Deck - Coleman Ltd.pptx
@@ -10,7 +10,6 @@
     <p:sldId id="258" r:id="rId9"/>
     <p:sldId id="259" r:id="rId10"/>
     <p:sldId id="260" r:id="rId11"/>
-    <p:sldId id="261" r:id="rId12"/>
   </p:sldIdLst>
   <p:sldSz cx="9144000" cy="6858000" type="screen4x3"/>
   <p:notesSz cx="6858000" cy="9144000"/>
@@ -3114,7 +3113,7 @@
                   <a:srgbClr val="1E4D2B"/>
                 </a:solidFill>
               </a:rPr>
-              <a:t>Vice President of Engineering Search: Coleman Ltd</a:t>
+              <a:t>Vice President of Engineering — Retained Search</a:t>
             </a:r>
           </a:p>
         </p:txBody>
@@ -3147,25 +3146,25 @@
           <a:p>
             <a:pPr lvl="1"/>
             <a:r>
-              <a:t>Engagement commenced March 6, 2016</a:t>
+              <a:t>Sponsor: Michael Martin, Chief Operating Officer</a:t>
             </a:r>
           </a:p>
           <a:p>
             <a:pPr lvl="1"/>
             <a:r>
-              <a:t>Prepared for Michael Martin, Chief Operating Officer</a:t>
+              <a:t>Engagement opened March 6, 2016</a:t>
             </a:r>
           </a:p>
           <a:p>
             <a:pPr lvl="1"/>
             <a:r>
-              <a:t>Prepared by Jeffrey Patterson, Research Consultant</a:t>
+              <a:t>A retained assignment, run to a written specification rather than a contingency scramble</a:t>
             </a:r>
           </a:p>
           <a:p>
             <a:pPr lvl="1"/>
             <a:r>
-              <a:t>Confidential. Candidates are identified by current role only.</a:t>
+              <a:t>Prepared by your Northgate search team for this progress review</a:t>
             </a:r>
           </a:p>
         </p:txBody>
@@ -3209,7 +3208,7 @@
                   <a:srgbClr val="1E4D2B"/>
                 </a:solidFill>
               </a:rPr>
-              <a:t>Where the Search Stands</a:t>
+              <a:t>The mandate</a:t>
             </a:r>
           </a:p>
         </p:txBody>
@@ -3231,31 +3230,31 @@
           <a:p>
             <a:pPr lvl="1"/>
             <a:r>
-              <a:t>Specification agreed and signed. We are sourcing against it, not against the job description it started as.</a:t>
+              <a:t>A Vice President of Engineering to lead the engineering function at Coleman Ltd.</a:t>
             </a:r>
           </a:p>
           <a:p>
             <a:pPr lvl="1"/>
             <a:r>
-              <a:t>Target company list closed at the companies we can approach and will approach.</a:t>
+              <a:t>A senior operating role, reporting into the leadership team and owning the people in it.</a:t>
             </a:r>
           </a:p>
           <a:p>
             <a:pPr lvl="1"/>
             <a:r>
-              <a:t>Market map complete. Long list built and being worked.</a:t>
+              <a:t>We are looking for an operator who has scaled a function, not a first-time leader.</a:t>
             </a:r>
           </a:p>
           <a:p>
             <a:pPr lvl="1"/>
             <a:r>
-              <a:t>First conversations underway. No slate yet, and none should be expected at this point in the work.</a:t>
+              <a:t>Someone the current team will follow, not only someone the board will approve.</a:t>
             </a:r>
           </a:p>
           <a:p>
             <a:pPr lvl="1"/>
             <a:r>
-              <a:t>On plan.</a:t>
+              <a:t>The written specification agreed at kickoff governs the search from here, and we hold ourselves to it.</a:t>
             </a:r>
           </a:p>
         </p:txBody>
@@ -3299,7 +3298,7 @@
                   <a:srgbClr val="1E4D2B"/>
                 </a:solidFill>
               </a:rPr>
-              <a:t>What the Market Looks Like</a:t>
+              <a:t>How we are running it</a:t>
             </a:r>
           </a:p>
         </p:txBody>
@@ -3321,25 +3320,31 @@
           <a:p>
             <a:pPr lvl="1"/>
             <a:r>
-              <a:t>The profile is real but thin. The population that has done this job at this scale is smaller than the specification implies it is.</a:t>
+              <a:t>John Chang is mapping the engineering-leadership market and building the long list we work from.</a:t>
             </a:r>
           </a:p>
           <a:p>
             <a:pPr lvl="1"/>
             <a:r>
-              <a:t>Nearly all of it is employed, senior, and not looking. Every conversation opens as a favor, not as an application.</a:t>
+              <a:t>James Grant is assessing the strongest sitting leaders against the brief and shaping the shortlist.</a:t>
             </a:r>
           </a:p>
           <a:p>
             <a:pPr lvl="1"/>
             <a:r>
-              <a:t>Two adjacent pools are worth opening: operators one level down inside larger organizations, and this profile at companies going through a different kind of change.</a:t>
+              <a:t>Approaches are discreet; we describe candidates by their current seat, never by name, in anything that circulates.</a:t>
             </a:r>
           </a:p>
           <a:p>
             <a:pPr lvl="1"/>
             <a:r>
-              <a:t>Compensation is not the binding constraint we expected. Scope is.</a:t>
+              <a:t>We ask the same discretion of you, since most of the people we approach have not spoken to their employers.</a:t>
+            </a:r>
+          </a:p>
+          <a:p>
+            <a:pPr lvl="1"/>
+            <a:r>
+              <a:t>Jeffrey Patterson keeps the search moving day to day and is your single point of contact.</a:t>
             </a:r>
           </a:p>
         </p:txBody>
@@ -3383,7 +3388,7 @@
                   <a:srgbClr val="1E4D2B"/>
                 </a:solidFill>
               </a:rPr>
-              <a:t>How We Are Working It</a:t>
+              <a:t>Where we are today</a:t>
             </a:r>
           </a:p>
         </p:txBody>
@@ -3405,25 +3410,31 @@
           <a:p>
             <a:pPr lvl="1"/>
             <a:r>
-              <a:t>Approaches are made by a person, not by a firm. James Grant makes the first call at the senior end, because that is the call that gets returned.</a:t>
+              <a:t>The market map is well advanced and reaching into two adjacent sectors where the experience also sits.</a:t>
             </a:r>
           </a:p>
           <a:p>
             <a:pPr lvl="1"/>
             <a:r>
-              <a:t>John Chang holds the map and the record. Every approach, every response, every decline with its reason.</a:t>
+              <a:t>The specification is agreed and already in use to calibrate every name.</a:t>
             </a:r>
           </a:p>
           <a:p>
             <a:pPr lvl="1"/>
             <a:r>
-              <a:t>Nothing goes forward that we have not met twice. You should not be the second interview a candidate has had.</a:t>
+              <a:t>The first discreet approaches are underway, and early conversations are encouraging.</a:t>
             </a:r>
           </a:p>
           <a:p>
             <a:pPr lvl="1"/>
             <a:r>
-              <a:t>We keep the set-asides. What we put down and why is as much of the product as what we bring you.</a:t>
+              <a:t>Two names stand out so far, both described here by their current seat rather than by name.</a:t>
+            </a:r>
+          </a:p>
+          <a:p>
+            <a:pPr lvl="1"/>
+            <a:r>
+              <a:t>No slate yet: we are still widening the field, not narrowing it, which is right for this stage.</a:t>
             </a:r>
           </a:p>
         </p:txBody>
@@ -3467,7 +3478,7 @@
                   <a:srgbClr val="1E4D2B"/>
                 </a:solidFill>
               </a:rPr>
-              <a:t>What We Need From You</a:t>
+              <a:t>What comes next</a:t>
             </a:r>
           </a:p>
         </p:txBody>
@@ -3489,109 +3500,31 @@
           <a:p>
             <a:pPr lvl="1"/>
             <a:r>
-              <a:t>A calibration session on four to six anonymized profiles. These are samples, not candidates; nobody in the pack is someone you can hire.</a:t>
+              <a:t>Complete the market approaches over the coming weeks and let the field settle.</a:t>
             </a:r>
           </a:p>
           <a:p>
             <a:pPr lvl="1"/>
             <a:r>
-              <a:t>A decision on the adjacent pools above. In or out, decided once, so that we are not relitigating it at the slate.</a:t>
+              <a:t>Work the long list down into a shortlist we will stand behind.</a:t>
             </a:r>
           </a:p>
           <a:p>
             <a:pPr lvl="1"/>
             <a:r>
-              <a:t>Confirmation of everyone who holds a vote on this hire, including anyone who holds one informally.</a:t>
+              <a:t>Complete first references before anyone reaches your interview room.</a:t>
             </a:r>
           </a:p>
           <a:p>
             <a:pPr lvl="1"/>
             <a:r>
-              <a:t>Interview availability blocked now, ahead of the slate rather than after it.</a:t>
-            </a:r>
-          </a:p>
-        </p:txBody>
-      </p:sp>
-    </p:spTree>
-  </p:cSld>
-  <p:clrMapOvr>
-    <a:masterClrMapping/>
-  </p:clrMapOvr>
-</p:sld>
-</file>
-
-<file path=ppt/slides/slide6.xml><?xml version="1.0" encoding="utf-8"?>
-<p:sld xmlns:a="http://schemas.openxmlformats.org/drawingml/2006/main" xmlns:p="http://schemas.openxmlformats.org/presentationml/2006/main" xmlns:r="http://schemas.openxmlformats.org/officeDocument/2006/relationships">
-  <p:cSld>
-    <p:spTree>
-      <p:nvGrpSpPr>
-        <p:cNvPr id="1" name=""/>
-        <p:cNvGrpSpPr/>
-        <p:nvPr/>
-      </p:nvGrpSpPr>
-      <p:grpSpPr/>
-      <p:sp>
-        <p:nvSpPr>
-          <p:cNvPr id="2" name="Title 1"/>
-          <p:cNvSpPr>
-            <a:spLocks noGrp="1"/>
-          </p:cNvSpPr>
-          <p:nvPr>
-            <p:ph type="title"/>
-          </p:nvPr>
-        </p:nvSpPr>
-        <p:spPr/>
-        <p:txBody>
-          <a:bodyPr/>
-          <a:lstStyle/>
-          <a:p>
-            <a:r>
-              <a:rPr>
-                <a:solidFill>
-                  <a:srgbClr val="1E4D2B"/>
-                </a:solidFill>
-              </a:rPr>
-              <a:t>Next Steps</a:t>
-            </a:r>
-          </a:p>
-        </p:txBody>
-      </p:sp>
-      <p:sp>
-        <p:nvSpPr>
-          <p:cNvPr id="3" name="Content Placeholder 2"/>
-          <p:cNvSpPr>
-            <a:spLocks noGrp="1"/>
-          </p:cNvSpPr>
-          <p:nvPr>
-            <p:ph idx="1"/>
-          </p:nvPr>
-        </p:nvSpPr>
-        <p:spPr/>
-        <p:txBody>
-          <a:bodyPr/>
-          <a:lstStyle/>
+              <a:t>Bring a first slate to Michael Martin for discussion, with candidates ready to meet you.</a:t>
+            </a:r>
+          </a:p>
           <a:p>
             <a:pPr lvl="1"/>
             <a:r>
-              <a:t>James Grant runs the calibration session with you and your team.</a:t>
-            </a:r>
-          </a:p>
-          <a:p>
-            <a:pPr lvl="1"/>
-            <a:r>
-              <a:t>John Chang extends the map into the adjacent pools, should you open them.</a:t>
-            </a:r>
-          </a:p>
-          <a:p>
-            <a:pPr lvl="1"/>
-            <a:r>
-              <a:t>Jeffrey Patterson reissues the specification if calibration moves it, and it usually moves it.</a:t>
-            </a:r>
-          </a:p>
-          <a:p>
-            <a:pPr lvl="1"/>
-            <a:r>
-              <a:t>Written update weekly. James Grant calls if something cannot wait for the written one.</a:t>
+              <a:t>Hold the weekly rhythm of updates between now and then, so no one has to ask.</a:t>
             </a:r>
           </a:p>
         </p:txBody>

--- a/companies/northgate-staffing/Engagements/Coleman Ltd/2016.04.27 - Briefing Deck - Coleman Ltd.pptx
+++ b/companies/northgate-staffing/Engagements/Coleman Ltd/2016.04.27 - Briefing Deck - Coleman Ltd.pptx
@@ -10,6 +10,7 @@
     <p:sldId id="258" r:id="rId9"/>
     <p:sldId id="259" r:id="rId10"/>
     <p:sldId id="260" r:id="rId11"/>
+    <p:sldId id="261" r:id="rId12"/>
   </p:sldIdLst>
   <p:sldSz cx="9144000" cy="6858000" type="screen4x3"/>
   <p:notesSz cx="6858000" cy="9144000"/>
@@ -3113,7 +3114,7 @@
                   <a:srgbClr val="1E4D2B"/>
                 </a:solidFill>
               </a:rPr>
-              <a:t>Vice President of Engineering — Retained Search</a:t>
+              <a:t>VP Engineering Search for Coleman Ltd</a:t>
             </a:r>
           </a:p>
         </p:txBody>
@@ -3138,33 +3139,9 @@
             </a:r>
           </a:p>
           <a:p>
-            <a:pPr lvl="1"/>
-            <a:r>
-              <a:t>Client: Coleman Ltd</a:t>
-            </a:r>
-          </a:p>
-          <a:p>
-            <a:pPr lvl="1"/>
-            <a:r>
-              <a:t>Sponsor: Michael Martin, Chief Operating Officer</a:t>
-            </a:r>
-          </a:p>
-          <a:p>
-            <a:pPr lvl="1"/>
-            <a:r>
-              <a:t>Engagement opened March 6, 2016</a:t>
-            </a:r>
-          </a:p>
-          <a:p>
-            <a:pPr lvl="1"/>
-            <a:r>
-              <a:t>A retained assignment, run to a written specification rather than a contingency scramble</a:t>
-            </a:r>
-          </a:p>
-          <a:p>
-            <a:pPr lvl="1"/>
-            <a:r>
-              <a:t>Prepared by your Northgate search team for this progress review</a:t>
+            <a:pPr/>
+            <a:r>
+              <a:t>A briefing for Michael Martin and his colleagues on where the search stands. The engagement commenced March 6, 2016 and is scoped to run about seven months. This briefing covers the research phase and the approaches now underway.</a:t>
             </a:r>
           </a:p>
         </p:txBody>
@@ -3208,7 +3185,7 @@
                   <a:srgbClr val="1E4D2B"/>
                 </a:solidFill>
               </a:rPr>
-              <a:t>The mandate</a:t>
+              <a:t>Where the search stands</a:t>
             </a:r>
           </a:p>
         </p:txBody>
@@ -3230,31 +3207,25 @@
           <a:p>
             <a:pPr lvl="1"/>
             <a:r>
-              <a:t>A Vice President of Engineering to lead the engineering function at Coleman Ltd.</a:t>
+              <a:t>The position specification is approved and is the document every approach is made against.</a:t>
             </a:r>
           </a:p>
           <a:p>
             <a:pPr lvl="1"/>
             <a:r>
-              <a:t>A senior operating role, reporting into the leadership team and owning the people in it.</a:t>
+              <a:t>The market map is complete for the sectors we agreed, and a second pass is open on two adjacent ones.</a:t>
             </a:r>
           </a:p>
           <a:p>
             <a:pPr lvl="1"/>
             <a:r>
-              <a:t>We are looking for an operator who has scaled a function, not a first-time leader.</a:t>
+              <a:t>The first wave of approaches has gone out; a second wave follows once we have read the response to the first.</a:t>
             </a:r>
           </a:p>
           <a:p>
             <a:pPr lvl="1"/>
             <a:r>
-              <a:t>Someone the current team will follow, not only someone the board will approve.</a:t>
-            </a:r>
-          </a:p>
-          <a:p>
-            <a:pPr lvl="1"/>
-            <a:r>
-              <a:t>The written specification agreed at kickoff governs the search from here, and we hold ourselves to it.</a:t>
+              <a:t>A number of conversations are live. None of them are far enough along to name in a document.</a:t>
             </a:r>
           </a:p>
         </p:txBody>
@@ -3298,7 +3269,7 @@
                   <a:srgbClr val="1E4D2B"/>
                 </a:solidFill>
               </a:rPr>
-              <a:t>How we are running it</a:t>
+              <a:t>What the market has said back</a:t>
             </a:r>
           </a:p>
         </p:txBody>
@@ -3320,31 +3291,19 @@
           <a:p>
             <a:pPr lvl="1"/>
             <a:r>
-              <a:t>John Chang is mapping the engineering-leadership market and building the long list we work from.</a:t>
+              <a:t>The profile exists, but it is concentrated in companies one size larger than yours, which is what we expected and planned for.</a:t>
             </a:r>
           </a:p>
           <a:p>
             <a:pPr lvl="1"/>
             <a:r>
-              <a:t>James Grant is assessing the strongest sitting leaders against the brief and shaping the shortlist.</a:t>
+              <a:t>The strongest people are not in the market. Each of them needs a reason to move, and the reason is the scope of the role and not the package.</a:t>
             </a:r>
           </a:p>
           <a:p>
             <a:pPr lvl="1"/>
             <a:r>
-              <a:t>Approaches are discreet; we describe candidates by their current seat, never by name, in anything that circulates.</a:t>
-            </a:r>
-          </a:p>
-          <a:p>
-            <a:pPr lvl="1"/>
-            <a:r>
-              <a:t>We ask the same discretion of you, since most of the people we approach have not spoken to their employers.</a:t>
-            </a:r>
-          </a:p>
-          <a:p>
-            <a:pPr lvl="1"/>
-            <a:r>
-              <a:t>Jeffrey Patterson keeps the search moving day to day and is your single point of contact.</a:t>
+              <a:t>Candidates ask early about the reporting line and about how much of the architecture decision is genuinely theirs. Clear answers there are worth more to us than anything else you can give us.</a:t>
             </a:r>
           </a:p>
         </p:txBody>
@@ -3388,7 +3347,7 @@
                   <a:srgbClr val="1E4D2B"/>
                 </a:solidFill>
               </a:rPr>
-              <a:t>Where we are today</a:t>
+              <a:t>How we are describing the role</a:t>
             </a:r>
           </a:p>
         </p:txBody>
@@ -3410,31 +3369,19 @@
           <a:p>
             <a:pPr lvl="1"/>
             <a:r>
-              <a:t>The market map is well advanced and reaching into two adjacent sectors where the experience also sits.</a:t>
+              <a:t>As ownership of the engineering organization through a change of platform, not as maintenance of the one you have.</a:t>
             </a:r>
           </a:p>
           <a:p>
             <a:pPr lvl="1"/>
             <a:r>
-              <a:t>The specification is agreed and already in use to calibrate every name.</a:t>
+              <a:t>As a seat where the executive is accountable for delivery and for the team that does it.</a:t>
             </a:r>
           </a:p>
           <a:p>
             <a:pPr lvl="1"/>
             <a:r>
-              <a:t>The first discreet approaches are underway, and early conversations are encouraging.</a:t>
-            </a:r>
-          </a:p>
-          <a:p>
-            <a:pPr lvl="1"/>
-            <a:r>
-              <a:t>Two names stand out so far, both described here by their current seat rather than by name.</a:t>
-            </a:r>
-          </a:p>
-          <a:p>
-            <a:pPr lvl="1"/>
-            <a:r>
-              <a:t>No slate yet: we are still widening the field, not narrowing it, which is right for this stage.</a:t>
+              <a:t>As a company at the point where the next stage of growth needs an engineering leader who has been there before.</a:t>
             </a:r>
           </a:p>
         </p:txBody>
@@ -3478,7 +3425,7 @@
                   <a:srgbClr val="1E4D2B"/>
                 </a:solidFill>
               </a:rPr>
-              <a:t>What comes next</a:t>
+              <a:t>Your team at Northgate</a:t>
             </a:r>
           </a:p>
         </p:txBody>
@@ -3500,31 +3447,97 @@
           <a:p>
             <a:pPr lvl="1"/>
             <a:r>
-              <a:t>Complete the market approaches over the coming weeks and let the field settle.</a:t>
+              <a:t>Jeffrey Patterson, Research Consultant, carries the search day to day and is your first call.</a:t>
             </a:r>
           </a:p>
           <a:p>
             <a:pPr lvl="1"/>
             <a:r>
-              <a:t>Work the long list down into a shortlist we will stand behind.</a:t>
+              <a:t>James Grant, Senior Consultant, works the target list and will sit in on your interviews.</a:t>
             </a:r>
           </a:p>
           <a:p>
             <a:pPr lvl="1"/>
             <a:r>
-              <a:t>Complete first references before anyone reaches your interview room.</a:t>
-            </a:r>
-          </a:p>
+              <a:t>John Chang, Research Associate, holds the market map, the scheduling, and the record of our sessions.</a:t>
+            </a:r>
+          </a:p>
+        </p:txBody>
+      </p:sp>
+    </p:spTree>
+  </p:cSld>
+  <p:clrMapOvr>
+    <a:masterClrMapping/>
+  </p:clrMapOvr>
+</p:sld>
+</file>
+
+<file path=ppt/slides/slide6.xml><?xml version="1.0" encoding="utf-8"?>
+<p:sld xmlns:a="http://schemas.openxmlformats.org/drawingml/2006/main" xmlns:p="http://schemas.openxmlformats.org/presentationml/2006/main" xmlns:r="http://schemas.openxmlformats.org/officeDocument/2006/relationships">
+  <p:cSld>
+    <p:spTree>
+      <p:nvGrpSpPr>
+        <p:cNvPr id="1" name=""/>
+        <p:cNvGrpSpPr/>
+        <p:nvPr/>
+      </p:nvGrpSpPr>
+      <p:grpSpPr/>
+      <p:sp>
+        <p:nvSpPr>
+          <p:cNvPr id="2" name="Title 1"/>
+          <p:cNvSpPr>
+            <a:spLocks noGrp="1"/>
+          </p:cNvSpPr>
+          <p:nvPr>
+            <p:ph type="title"/>
+          </p:nvPr>
+        </p:nvSpPr>
+        <p:spPr/>
+        <p:txBody>
+          <a:bodyPr/>
+          <a:lstStyle/>
+          <a:p>
+            <a:r>
+              <a:rPr>
+                <a:solidFill>
+                  <a:srgbClr val="1E4D2B"/>
+                </a:solidFill>
+              </a:rPr>
+              <a:t>What happens next</a:t>
+            </a:r>
+          </a:p>
+        </p:txBody>
+      </p:sp>
+      <p:sp>
+        <p:nvSpPr>
+          <p:cNvPr id="3" name="Content Placeholder 2"/>
+          <p:cNvSpPr>
+            <a:spLocks noGrp="1"/>
+          </p:cNvSpPr>
+          <p:nvPr>
+            <p:ph idx="1"/>
+          </p:nvPr>
+        </p:nvSpPr>
+        <p:spPr/>
+        <p:txBody>
+          <a:bodyPr/>
+          <a:lstStyle/>
           <a:p>
             <a:pPr lvl="1"/>
             <a:r>
-              <a:t>Bring a first slate to Michael Martin for discussion, with candidates ready to meet you.</a:t>
+              <a:t>A calibration session with you, to test the specification against what the market has told us.</a:t>
             </a:r>
           </a:p>
           <a:p>
             <a:pPr lvl="1"/>
             <a:r>
-              <a:t>Hold the weekly rhythm of updates between now and then, so no one has to ask.</a:t>
+              <a:t>Your ruling on the three companies we flagged as too close to Coleman Ltd to approach without it.</a:t>
+            </a:r>
+          </a:p>
+          <a:p>
+            <a:pPr lvl="1"/>
+            <a:r>
+              <a:t>Second wave of approaches, then first-round assessment interviews conducted by us.</a:t>
             </a:r>
           </a:p>
         </p:txBody>
